--- a/public/fun/pack/pptx/newspro/카드뉴스프리미엄_17_건강·안심습관_코발트아이보리.pptx
+++ b/public/fun/pack/pptx/newspro/카드뉴스프리미엄_17_건강·안심습관_코발트아이보리.pptx
@@ -113,12 +113,12 @@
   <p:extLst>
     <p:ext uri="{521415D9-36F7-43E2-AB2F-B90AF26B5E84}">
       <p14:sectionLst xmlns:p14="http://schemas.microsoft.com/office/powerpoint/2010/main">
-        <p14:section name="시작" id="{77905CB1-0DE8-4C2F-A34B-5A0C381E6658}">
+        <p14:section name="시작" id="{1AC93331-2633-4AF6-9590-9AD677B8922B}">
           <p14:sldIdLst>
             <p14:sldId id="256"/>
           </p14:sldIdLst>
         </p14:section>
-        <p14:section name="본문" id="{CC7E260A-C4AE-447F-8509-C8D15F49D77F}">
+        <p14:section name="본문" id="{72907A20-F0D3-4A2D-9C76-593FFF9C7D98}">
           <p14:sldIdLst>
             <p14:sldId id="257"/>
             <p14:sldId id="258"/>
@@ -127,7 +127,7 @@
             <p14:sldId id="261"/>
           </p14:sldIdLst>
         </p14:section>
-        <p14:section name="마무리" id="{0F024A89-71A0-4C3B-A3E1-E51C2814624E}">
+        <p14:section name="마무리" id="{D3DE9B5C-BCA0-4DFA-B4E2-0F10C3FFC88A}">
           <p14:sldIdLst>
             <p14:sldId id="262"/>
           </p14:sldIdLst>
@@ -1501,7 +1501,7 @@
             </a:lvl1pPr>
           </a:lstStyle>
           <a:p>
-            <a:fld id="{E1DF51C9-E23C-442E-87AB-18365D2658FA}" type="slidenum">
+            <a:fld id="{53BA539A-465D-4172-8414-54DC18CC9BCE}" type="slidenum">
               <a:rPr lang="en-US"/>
               <a:t>‹#›</a:t>
             </a:fld>
@@ -2113,7 +2113,7 @@
             </a:lvl1pPr>
           </a:lstStyle>
           <a:p>
-            <a:fld id="{1754538F-367C-45E5-A052-CAEB0B055C3D}" type="slidenum">
+            <a:fld id="{E2862F1C-1381-41AF-82F9-9506BF72DC0B}" type="slidenum">
               <a:rPr lang="en-US"/>
               <a:t>‹#›</a:t>
             </a:fld>
@@ -2742,7 +2742,7 @@
             </a:lvl1pPr>
           </a:lstStyle>
           <a:p>
-            <a:fld id="{04B25EEF-553E-44A8-B140-132DE5452861}" type="slidenum">
+            <a:fld id="{2AA7D88B-4B84-4959-8D73-48F165A8A4FA}" type="slidenum">
               <a:rPr lang="en-US"/>
               <a:t>‹#›</a:t>
             </a:fld>
@@ -3688,7 +3688,7 @@
           <a:bodyPr/>
           <a:lstStyle/>
           <a:p>
-            <a:fld id="{1CEE253B-8142-4860-B46E-9394845FBC1B}" type="slidenum">
+            <a:fld id="{18D9062D-5022-4EF9-AD8A-2E3CD308478C}" type="slidenum">
               <a:rPr lang="en-US"/>
               <a:t>‹#›</a:t>
             </a:fld>
@@ -3854,7 +3854,7 @@
           <a:bodyPr/>
           <a:lstStyle/>
           <a:p>
-            <a:fld id="{356E06EE-2E35-448B-80B9-53CF1BF16B41}" type="slidenum">
+            <a:fld id="{4DA03D2C-A30A-4857-B4B0-46CCD282E613}" type="slidenum">
               <a:rPr lang="en-US"/>
               <a:t>‹#›</a:t>
             </a:fld>
@@ -4020,7 +4020,7 @@
           <a:bodyPr/>
           <a:lstStyle/>
           <a:p>
-            <a:fld id="{77EE905E-852B-45C1-A937-FA4A5E47B7DD}" type="slidenum">
+            <a:fld id="{660191BA-B188-49B6-8204-9B0C834EAB11}" type="slidenum">
               <a:rPr lang="en-US"/>
               <a:t>‹#›</a:t>
             </a:fld>
@@ -4186,7 +4186,7 @@
           <a:bodyPr/>
           <a:lstStyle/>
           <a:p>
-            <a:fld id="{9A9C8173-8545-4724-9167-D84C3B3CB258}" type="slidenum">
+            <a:fld id="{3CFF5E8F-154C-4B1B-B79A-B3DAB8E405A1}" type="slidenum">
               <a:rPr lang="en-US"/>
               <a:t>‹#›</a:t>
             </a:fld>
@@ -4352,7 +4352,7 @@
           <a:bodyPr/>
           <a:lstStyle/>
           <a:p>
-            <a:fld id="{EA8BF8C5-5DFA-467E-9A61-9B3F5F0890CE}" type="slidenum">
+            <a:fld id="{D00C57FB-CD0F-4C00-B167-14E44683D628}" type="slidenum">
               <a:rPr lang="en-US"/>
               <a:t>‹#›</a:t>
             </a:fld>
